--- a/Final DevOps Project/demo/slides.pptx
+++ b/Final DevOps Project/demo/slides.pptx
@@ -1690,7 +1690,7 @@
           <a:lstStyle>
             <a:lvl1pPr algn="l" indent="0" marL="0">
               <a:buNone/>
-              <a:defRPr lang="en-US" sz="3000" b="1" spc="-40" kern="0" dirty="0">
+              <a:defRPr lang="en-US" sz="3700" b="1" spc="-90" kern="0" dirty="0">
                 <a:solidFill>
                   <a:srgbClr val="14191B"/>
                 </a:solidFill>
@@ -1701,7 +1701,7 @@
             <a:pPr algn="l" indent="0" marL="0">
               <a:buNone/>
             </a:pPr>
-            <a:endParaRPr lang="en-US" sz="3000" dirty="0"/>
+            <a:endParaRPr lang="en-US" sz="3700" dirty="0"/>
           </a:p>
         </p:txBody>
       </p:sp>
@@ -2187,36 +2187,36 @@
           <a:p>
             <a:pPr indent="0" marL="0">
               <a:lnSpc>
-                <a:spcPct val="95000"/>
+                <a:spcPct val="92000"/>
               </a:lnSpc>
               <a:buNone/>
             </a:pPr>
             <a:r>
-              <a:rPr lang="en-US" sz="5400" b="1" spc="-160" kern="0" dirty="0">
+              <a:rPr lang="en-US" sz="6000" b="1" spc="-220" kern="0" dirty="0">
                 <a:solidFill>
                   <a:srgbClr val="FFFFFF"/>
                 </a:solidFill>
               </a:rPr>
               <a:t>Issue Tracker,</a:t>
             </a:r>
-            <a:endParaRPr lang="en-US" sz="5400" dirty="0"/>
+            <a:endParaRPr lang="en-US" sz="6000" dirty="0"/>
           </a:p>
           <a:p>
             <a:pPr indent="0" marL="0">
               <a:lnSpc>
-                <a:spcPct val="95000"/>
+                <a:spcPct val="92000"/>
               </a:lnSpc>
               <a:buNone/>
             </a:pPr>
             <a:r>
-              <a:rPr lang="en-US" sz="5400" b="1" spc="-160" kern="0" dirty="0">
+              <a:rPr lang="en-US" sz="6000" b="1" spc="-220" kern="0" dirty="0">
                 <a:solidFill>
                   <a:srgbClr val="FFFFFF"/>
                 </a:solidFill>
               </a:rPr>
               <a:t>end to end</a:t>
             </a:r>
-            <a:endParaRPr lang="en-US" sz="5400" dirty="0"/>
+            <a:endParaRPr lang="en-US" sz="6000" dirty="0"/>
           </a:p>
         </p:txBody>
       </p:sp>
@@ -2660,14 +2660,14 @@
               <a:buNone/>
             </a:pPr>
             <a:r>
-              <a:rPr lang="en-US" sz="3000" b="1" spc="-40" kern="0" dirty="0">
+              <a:rPr lang="en-US" sz="3700" b="1" spc="-90" kern="0" dirty="0">
                 <a:solidFill>
                   <a:srgbClr val="14191B"/>
                 </a:solidFill>
               </a:rPr>
               <a:t>Observability</a:t>
             </a:r>
-            <a:endParaRPr lang="en-US" sz="3000" dirty="0"/>
+            <a:endParaRPr lang="en-US" sz="3700" dirty="0"/>
           </a:p>
         </p:txBody>
       </p:sp>
@@ -2719,19 +2719,19 @@
           <a:p>
             <a:pPr indent="0" marL="0">
               <a:lnSpc>
-                <a:spcPct val="105000"/>
+                <a:spcPct val="103000"/>
               </a:lnSpc>
               <a:buNone/>
             </a:pPr>
             <a:r>
-              <a:rPr lang="en-US" sz="2100" b="1" spc="-40" kern="0" dirty="0">
+              <a:rPr lang="en-US" sz="2400" b="1" spc="-70" kern="0" dirty="0">
                 <a:solidFill>
                   <a:srgbClr val="14191B"/>
                 </a:solidFill>
               </a:rPr>
               <a:t>The autoscaler and the monitoring are designed together: neither has to know how many replicas there will be.</a:t>
             </a:r>
-            <a:endParaRPr lang="en-US" sz="2100" dirty="0"/>
+            <a:endParaRPr lang="en-US" sz="2400" dirty="0"/>
           </a:p>
         </p:txBody>
       </p:sp>
@@ -2785,7 +2785,7 @@
               <a:buNone/>
             </a:pPr>
             <a:r>
-              <a:rPr lang="en-US" sz="1350" b="1" dirty="0">
+              <a:rPr lang="en-US" sz="1350" b="1" spc="-20" kern="0" dirty="0">
                 <a:solidFill>
                   <a:srgbClr val="14191B"/>
                 </a:solidFill>
@@ -2885,7 +2885,7 @@
               <a:buNone/>
             </a:pPr>
             <a:r>
-              <a:rPr lang="en-US" sz="1350" b="1" dirty="0">
+              <a:rPr lang="en-US" sz="1350" b="1" spc="-20" kern="0" dirty="0">
                 <a:solidFill>
                   <a:srgbClr val="14191B"/>
                 </a:solidFill>
@@ -2985,7 +2985,7 @@
               <a:buNone/>
             </a:pPr>
             <a:r>
-              <a:rPr lang="en-US" sz="1350" b="1" dirty="0">
+              <a:rPr lang="en-US" sz="1350" b="1" spc="-20" kern="0" dirty="0">
                 <a:solidFill>
                   <a:srgbClr val="14191B"/>
                 </a:solidFill>
@@ -3085,7 +3085,7 @@
               <a:buNone/>
             </a:pPr>
             <a:r>
-              <a:rPr lang="en-US" sz="1350" b="1" dirty="0">
+              <a:rPr lang="en-US" sz="1350" b="1" spc="-20" kern="0" dirty="0">
                 <a:solidFill>
                   <a:srgbClr val="14191B"/>
                 </a:solidFill>
@@ -3532,14 +3532,14 @@
               <a:buNone/>
             </a:pPr>
             <a:r>
-              <a:rPr lang="en-US" sz="3000" b="1" spc="-40" kern="0" dirty="0">
+              <a:rPr lang="en-US" sz="3700" b="1" spc="-90" kern="0" dirty="0">
                 <a:solidFill>
                   <a:srgbClr val="14191B"/>
                 </a:solidFill>
               </a:rPr>
               <a:t>GitOps</a:t>
             </a:r>
-            <a:endParaRPr lang="en-US" sz="3000" dirty="0"/>
+            <a:endParaRPr lang="en-US" sz="3700" dirty="0"/>
           </a:p>
         </p:txBody>
       </p:sp>
@@ -3630,19 +3630,19 @@
           <a:p>
             <a:pPr indent="0" marL="0">
               <a:lnSpc>
-                <a:spcPct val="105000"/>
+                <a:spcPct val="103000"/>
               </a:lnSpc>
               <a:buNone/>
             </a:pPr>
             <a:r>
-              <a:rPr lang="en-US" sz="2300" b="1" spc="-50" kern="0" dirty="0">
+              <a:rPr lang="en-US" sz="2600" b="1" spc="-90" kern="0" dirty="0">
                 <a:solidFill>
                   <a:srgbClr val="14191B"/>
                 </a:solidFill>
               </a:rPr>
               <a:t>GitOps and an autoscaler disagree about who owns the replica count.</a:t>
             </a:r>
-            <a:endParaRPr lang="en-US" sz="2300" dirty="0"/>
+            <a:endParaRPr lang="en-US" sz="2600" dirty="0"/>
           </a:p>
         </p:txBody>
       </p:sp>
@@ -4021,14 +4021,14 @@
               <a:buNone/>
             </a:pPr>
             <a:r>
-              <a:rPr lang="en-US" sz="3000" b="1" spc="-40" kern="0" dirty="0">
+              <a:rPr lang="en-US" sz="3700" b="1" spc="-90" kern="0" dirty="0">
                 <a:solidFill>
                   <a:srgbClr val="14191B"/>
                 </a:solidFill>
               </a:rPr>
               <a:t>Troubleshooting drill</a:t>
             </a:r>
-            <a:endParaRPr lang="en-US" sz="3000" dirty="0"/>
+            <a:endParaRPr lang="en-US" sz="3700" dirty="0"/>
           </a:p>
         </p:txBody>
       </p:sp>
@@ -5043,14 +5043,14 @@
               <a:buNone/>
             </a:pPr>
             <a:r>
-              <a:rPr lang="en-US" sz="3000" b="1" spc="-40" kern="0" dirty="0">
+              <a:rPr lang="en-US" sz="3700" b="1" spc="-90" kern="0" dirty="0">
                 <a:solidFill>
                   <a:srgbClr val="FFFFFF"/>
                 </a:solidFill>
               </a:rPr>
               <a:t>What it taught</a:t>
             </a:r>
-            <a:endParaRPr lang="en-US" sz="3000" dirty="0"/>
+            <a:endParaRPr lang="en-US" sz="3700" dirty="0"/>
           </a:p>
         </p:txBody>
       </p:sp>
@@ -5603,14 +5603,14 @@
               <a:buNone/>
             </a:pPr>
             <a:r>
-              <a:rPr lang="en-US" sz="3000" b="1" spc="-40" kern="0" dirty="0">
+              <a:rPr lang="en-US" sz="3700" b="1" spc="-90" kern="0" dirty="0">
                 <a:solidFill>
                   <a:srgbClr val="14191B"/>
                 </a:solidFill>
               </a:rPr>
               <a:t>What it is</a:t>
             </a:r>
-            <a:endParaRPr lang="en-US" sz="3000" dirty="0"/>
+            <a:endParaRPr lang="en-US" sz="3700" dirty="0"/>
           </a:p>
         </p:txBody>
       </p:sp>
@@ -5662,19 +5662,19 @@
           <a:p>
             <a:pPr indent="0" marL="0">
               <a:lnSpc>
-                <a:spcPct val="105000"/>
+                <a:spcPct val="103000"/>
               </a:lnSpc>
               <a:buNone/>
             </a:pPr>
             <a:r>
-              <a:rPr lang="en-US" sz="2400" b="1" spc="-50" kern="0" dirty="0">
+              <a:rPr lang="en-US" sz="2700" b="1" spc="-90" kern="0" dirty="0">
                 <a:solidFill>
                   <a:srgbClr val="14191B"/>
                 </a:solidFill>
               </a:rPr>
               <a:t>The application is deliberately small so the system around it can be the subject.</a:t>
             </a:r>
-            <a:endParaRPr lang="en-US" sz="2400" dirty="0"/>
+            <a:endParaRPr lang="en-US" sz="2700" dirty="0"/>
           </a:p>
         </p:txBody>
       </p:sp>
@@ -6386,14 +6386,14 @@
               <a:buNone/>
             </a:pPr>
             <a:r>
-              <a:rPr lang="en-US" sz="3000" b="1" spc="-40" kern="0" dirty="0">
+              <a:rPr lang="en-US" sz="3700" b="1" spc="-90" kern="0" dirty="0">
                 <a:solidFill>
                   <a:srgbClr val="14191B"/>
                 </a:solidFill>
               </a:rPr>
               <a:t>Architecture</a:t>
             </a:r>
-            <a:endParaRPr lang="en-US" sz="3000" dirty="0"/>
+            <a:endParaRPr lang="en-US" sz="3700" dirty="0"/>
           </a:p>
         </p:txBody>
       </p:sp>
@@ -7620,14 +7620,14 @@
               <a:buNone/>
             </a:pPr>
             <a:r>
-              <a:rPr lang="en-US" sz="3000" b="1" spc="-40" kern="0" dirty="0">
+              <a:rPr lang="en-US" sz="3700" b="1" spc="-90" kern="0" dirty="0">
                 <a:solidFill>
                   <a:srgbClr val="14191B"/>
                 </a:solidFill>
               </a:rPr>
               <a:t>Stack</a:t>
             </a:r>
-            <a:endParaRPr lang="en-US" sz="3000" dirty="0"/>
+            <a:endParaRPr lang="en-US" sz="3700" dirty="0"/>
           </a:p>
         </p:txBody>
       </p:sp>
@@ -7773,17 +7773,17 @@
         <p:spPr>
           <a:xfrm>
             <a:off x="731520" y="1755648"/>
-            <a:ext cx="10698480" cy="12802"/>
+            <a:ext cx="10698480" cy="7315"/>
           </a:xfrm>
           <a:prstGeom prst="rect">
             <a:avLst/>
           </a:prstGeom>
           <a:solidFill>
-            <a:srgbClr val="14191B"/>
+            <a:srgbClr val="9DAEB3"/>
           </a:solidFill>
           <a:ln w="12700">
             <a:solidFill>
-              <a:srgbClr val="14191B"/>
+              <a:srgbClr val="9DAEB3"/>
             </a:solidFill>
             <a:prstDash val="solid"/>
           </a:ln>
@@ -7814,14 +7814,14 @@
               <a:buNone/>
             </a:pPr>
             <a:r>
-              <a:rPr lang="en-US" sz="1450" b="1" dirty="0">
+              <a:rPr lang="en-US" sz="1700" b="1" spc="-30" kern="0" dirty="0">
                 <a:solidFill>
                   <a:srgbClr val="14191B"/>
                 </a:solidFill>
               </a:rPr>
               <a:t>Application</a:t>
             </a:r>
-            <a:endParaRPr lang="en-US" sz="1450" dirty="0"/>
+            <a:endParaRPr lang="en-US" sz="1700" dirty="0"/>
           </a:p>
         </p:txBody>
       </p:sp>
@@ -7850,14 +7850,14 @@
               <a:buNone/>
             </a:pPr>
             <a:r>
-              <a:rPr lang="en-US" sz="1300" dirty="0">
+              <a:rPr lang="en-US" sz="1350" dirty="0">
                 <a:solidFill>
                   <a:srgbClr val="14191B"/>
                 </a:solidFill>
               </a:rPr>
               <a:t>React 18 · Vite</a:t>
             </a:r>
-            <a:endParaRPr lang="en-US" sz="1300" dirty="0"/>
+            <a:endParaRPr lang="en-US" sz="1350" dirty="0"/>
           </a:p>
         </p:txBody>
       </p:sp>
@@ -7886,14 +7886,14 @@
               <a:buNone/>
             </a:pPr>
             <a:r>
-              <a:rPr lang="en-US" sz="1250" dirty="0">
-                <a:solidFill>
-                  <a:srgbClr val="4A5861"/>
+              <a:rPr lang="en-US" sz="1150" dirty="0">
+                <a:solidFill>
+                  <a:srgbClr val="5C6E76"/>
                 </a:solidFill>
               </a:rPr>
               <a:t>FastAPI · SQLAlchemy 2 · Alembic · PostgreSQL 16</a:t>
             </a:r>
-            <a:endParaRPr lang="en-US" sz="1250" dirty="0"/>
+            <a:endParaRPr lang="en-US" sz="1150" dirty="0"/>
           </a:p>
         </p:txBody>
       </p:sp>
@@ -7947,14 +7947,14 @@
               <a:buNone/>
             </a:pPr>
             <a:r>
-              <a:rPr lang="en-US" sz="1450" b="1" dirty="0">
+              <a:rPr lang="en-US" sz="1700" b="1" spc="-30" kern="0" dirty="0">
                 <a:solidFill>
                   <a:srgbClr val="14191B"/>
                 </a:solidFill>
               </a:rPr>
               <a:t>Containers</a:t>
             </a:r>
-            <a:endParaRPr lang="en-US" sz="1450" dirty="0"/>
+            <a:endParaRPr lang="en-US" sz="1700" dirty="0"/>
           </a:p>
         </p:txBody>
       </p:sp>
@@ -7983,14 +7983,14 @@
               <a:buNone/>
             </a:pPr>
             <a:r>
-              <a:rPr lang="en-US" sz="1300" dirty="0">
+              <a:rPr lang="en-US" sz="1350" dirty="0">
                 <a:solidFill>
                   <a:srgbClr val="14191B"/>
                 </a:solidFill>
               </a:rPr>
               <a:t>Multi-stage</a:t>
             </a:r>
-            <a:endParaRPr lang="en-US" sz="1300" dirty="0"/>
+            <a:endParaRPr lang="en-US" sz="1350" dirty="0"/>
           </a:p>
         </p:txBody>
       </p:sp>
@@ -8019,14 +8019,14 @@
               <a:buNone/>
             </a:pPr>
             <a:r>
-              <a:rPr lang="en-US" sz="1250" dirty="0">
-                <a:solidFill>
-                  <a:srgbClr val="4A5861"/>
+              <a:rPr lang="en-US" sz="1150" dirty="0">
+                <a:solidFill>
+                  <a:srgbClr val="5C6E76"/>
                 </a:solidFill>
               </a:rPr>
               <a:t>non-root UIDs · nginx-unprivileged · Docker Compose</a:t>
             </a:r>
-            <a:endParaRPr lang="en-US" sz="1250" dirty="0"/>
+            <a:endParaRPr lang="en-US" sz="1150" dirty="0"/>
           </a:p>
         </p:txBody>
       </p:sp>
@@ -8080,14 +8080,14 @@
               <a:buNone/>
             </a:pPr>
             <a:r>
-              <a:rPr lang="en-US" sz="1450" b="1" dirty="0">
+              <a:rPr lang="en-US" sz="1700" b="1" spc="-30" kern="0" dirty="0">
                 <a:solidFill>
                   <a:srgbClr val="14191B"/>
                 </a:solidFill>
               </a:rPr>
               <a:t>Pipeline</a:t>
             </a:r>
-            <a:endParaRPr lang="en-US" sz="1450" dirty="0"/>
+            <a:endParaRPr lang="en-US" sz="1700" dirty="0"/>
           </a:p>
         </p:txBody>
       </p:sp>
@@ -8116,14 +8116,14 @@
               <a:buNone/>
             </a:pPr>
             <a:r>
-              <a:rPr lang="en-US" sz="1300" dirty="0">
+              <a:rPr lang="en-US" sz="1350" dirty="0">
                 <a:solidFill>
                   <a:srgbClr val="14191B"/>
                 </a:solidFill>
               </a:rPr>
               <a:t>GitHub Actions</a:t>
             </a:r>
-            <a:endParaRPr lang="en-US" sz="1300" dirty="0"/>
+            <a:endParaRPr lang="en-US" sz="1350" dirty="0"/>
           </a:p>
         </p:txBody>
       </p:sp>
@@ -8152,14 +8152,14 @@
               <a:buNone/>
             </a:pPr>
             <a:r>
-              <a:rPr lang="en-US" sz="1250" dirty="0">
-                <a:solidFill>
-                  <a:srgbClr val="4A5861"/>
+              <a:rPr lang="en-US" sz="1150" dirty="0">
+                <a:solidFill>
+                  <a:srgbClr val="5C6E76"/>
                 </a:solidFill>
               </a:rPr>
               <a:t>GHCR · Trivy · Helm · kind inside the runner</a:t>
             </a:r>
-            <a:endParaRPr lang="en-US" sz="1250" dirty="0"/>
+            <a:endParaRPr lang="en-US" sz="1150" dirty="0"/>
           </a:p>
         </p:txBody>
       </p:sp>
@@ -8213,14 +8213,14 @@
               <a:buNone/>
             </a:pPr>
             <a:r>
-              <a:rPr lang="en-US" sz="1450" b="1" dirty="0">
+              <a:rPr lang="en-US" sz="1700" b="1" spc="-30" kern="0" dirty="0">
                 <a:solidFill>
                   <a:srgbClr val="14191B"/>
                 </a:solidFill>
               </a:rPr>
               <a:t>Cluster</a:t>
             </a:r>
-            <a:endParaRPr lang="en-US" sz="1450" dirty="0"/>
+            <a:endParaRPr lang="en-US" sz="1700" dirty="0"/>
           </a:p>
         </p:txBody>
       </p:sp>
@@ -8249,14 +8249,14 @@
               <a:buNone/>
             </a:pPr>
             <a:r>
-              <a:rPr lang="en-US" sz="1300" dirty="0">
+              <a:rPr lang="en-US" sz="1350" dirty="0">
                 <a:solidFill>
                   <a:srgbClr val="14191B"/>
                 </a:solidFill>
               </a:rPr>
               <a:t>Minikube</a:t>
             </a:r>
-            <a:endParaRPr lang="en-US" sz="1300" dirty="0"/>
+            <a:endParaRPr lang="en-US" sz="1350" dirty="0"/>
           </a:p>
         </p:txBody>
       </p:sp>
@@ -8285,14 +8285,14 @@
               <a:buNone/>
             </a:pPr>
             <a:r>
-              <a:rPr lang="en-US" sz="1250" dirty="0">
-                <a:solidFill>
-                  <a:srgbClr val="4A5861"/>
+              <a:rPr lang="en-US" sz="1150" dirty="0">
+                <a:solidFill>
+                  <a:srgbClr val="5C6E76"/>
                 </a:solidFill>
               </a:rPr>
               <a:t>ingress-nginx · metrics-server · one chart, three value files</a:t>
             </a:r>
-            <a:endParaRPr lang="en-US" sz="1250" dirty="0"/>
+            <a:endParaRPr lang="en-US" sz="1150" dirty="0"/>
           </a:p>
         </p:txBody>
       </p:sp>
@@ -8346,14 +8346,14 @@
               <a:buNone/>
             </a:pPr>
             <a:r>
-              <a:rPr lang="en-US" sz="1450" b="1" dirty="0">
+              <a:rPr lang="en-US" sz="1700" b="1" spc="-30" kern="0" dirty="0">
                 <a:solidFill>
                   <a:srgbClr val="14191B"/>
                 </a:solidFill>
               </a:rPr>
               <a:t>Operations</a:t>
             </a:r>
-            <a:endParaRPr lang="en-US" sz="1450" dirty="0"/>
+            <a:endParaRPr lang="en-US" sz="1700" dirty="0"/>
           </a:p>
         </p:txBody>
       </p:sp>
@@ -8382,14 +8382,14 @@
               <a:buNone/>
             </a:pPr>
             <a:r>
-              <a:rPr lang="en-US" sz="1300" dirty="0">
+              <a:rPr lang="en-US" sz="1350" dirty="0">
                 <a:solidFill>
                   <a:srgbClr val="14191B"/>
                 </a:solidFill>
               </a:rPr>
               <a:t>Prometheus</a:t>
             </a:r>
-            <a:endParaRPr lang="en-US" sz="1300" dirty="0"/>
+            <a:endParaRPr lang="en-US" sz="1350" dirty="0"/>
           </a:p>
         </p:txBody>
       </p:sp>
@@ -8418,14 +8418,14 @@
               <a:buNone/>
             </a:pPr>
             <a:r>
-              <a:rPr lang="en-US" sz="1250" dirty="0">
-                <a:solidFill>
-                  <a:srgbClr val="4A5861"/>
+              <a:rPr lang="en-US" sz="1150" dirty="0">
+                <a:solidFill>
+                  <a:srgbClr val="5C6E76"/>
                 </a:solidFill>
               </a:rPr>
               <a:t>Grafana · alert rules · Argo CD · Terraform for the network</a:t>
             </a:r>
-            <a:endParaRPr lang="en-US" sz="1250" dirty="0"/>
+            <a:endParaRPr lang="en-US" sz="1150" dirty="0"/>
           </a:p>
         </p:txBody>
       </p:sp>
@@ -8590,14 +8590,14 @@
               <a:buNone/>
             </a:pPr>
             <a:r>
-              <a:rPr lang="en-US" sz="3000" b="1" spc="-40" kern="0" dirty="0">
+              <a:rPr lang="en-US" sz="3700" b="1" spc="-90" kern="0" dirty="0">
                 <a:solidFill>
                   <a:srgbClr val="14191B"/>
                 </a:solidFill>
               </a:rPr>
               <a:t>The API</a:t>
             </a:r>
-            <a:endParaRPr lang="en-US" sz="3000" dirty="0"/>
+            <a:endParaRPr lang="en-US" sz="3700" dirty="0"/>
           </a:p>
         </p:txBody>
       </p:sp>
@@ -9787,19 +9787,19 @@
           <a:p>
             <a:pPr indent="0" marL="0">
               <a:lnSpc>
-                <a:spcPct val="110000"/>
+                <a:spcPct val="108000"/>
               </a:lnSpc>
               <a:buNone/>
             </a:pPr>
             <a:r>
-              <a:rPr lang="en-US" sz="1700" b="1" spc="-30" kern="0" dirty="0">
+              <a:rPr lang="en-US" sz="1900" b="1" spc="-50" kern="0" dirty="0">
                 <a:solidFill>
                   <a:srgbClr val="14191B"/>
                 </a:solidFill>
               </a:rPr>
               <a:t>A liveness probe that queried the database would restart a healthy Pod every time the database blinked.</a:t>
             </a:r>
-            <a:endParaRPr lang="en-US" sz="1700" dirty="0"/>
+            <a:endParaRPr lang="en-US" sz="1900" dirty="0"/>
           </a:p>
         </p:txBody>
       </p:sp>
@@ -9965,14 +9965,14 @@
               <a:buNone/>
             </a:pPr>
             <a:r>
-              <a:rPr lang="en-US" sz="3000" b="1" spc="-40" kern="0" dirty="0">
+              <a:rPr lang="en-US" sz="3700" b="1" spc="-90" kern="0" dirty="0">
                 <a:solidFill>
                   <a:srgbClr val="14191B"/>
                 </a:solidFill>
               </a:rPr>
               <a:t>Containers</a:t>
             </a:r>
-            <a:endParaRPr lang="en-US" sz="3000" dirty="0"/>
+            <a:endParaRPr lang="en-US" sz="3700" dirty="0"/>
           </a:p>
         </p:txBody>
       </p:sp>
@@ -10340,7 +10340,7 @@
               <a:buNone/>
             </a:pPr>
             <a:r>
-              <a:rPr lang="en-US" sz="1400" b="1" dirty="0">
+              <a:rPr lang="en-US" sz="1400" b="1" spc="-20" kern="0" dirty="0">
                 <a:solidFill>
                   <a:srgbClr val="14191B"/>
                 </a:solidFill>
@@ -10440,7 +10440,7 @@
               <a:buNone/>
             </a:pPr>
             <a:r>
-              <a:rPr lang="en-US" sz="1400" b="1" dirty="0">
+              <a:rPr lang="en-US" sz="1400" b="1" spc="-20" kern="0" dirty="0">
                 <a:solidFill>
                   <a:srgbClr val="14191B"/>
                 </a:solidFill>
@@ -10540,7 +10540,7 @@
               <a:buNone/>
             </a:pPr>
             <a:r>
-              <a:rPr lang="en-US" sz="1400" b="1" dirty="0">
+              <a:rPr lang="en-US" sz="1400" b="1" spc="-20" kern="0" dirty="0">
                 <a:solidFill>
                   <a:srgbClr val="14191B"/>
                 </a:solidFill>
@@ -10687,14 +10687,14 @@
               <a:buNone/>
             </a:pPr>
             <a:r>
-              <a:rPr lang="en-US" sz="3000" b="1" spc="-40" kern="0" dirty="0">
+              <a:rPr lang="en-US" sz="3700" b="1" spc="-90" kern="0" dirty="0">
                 <a:solidFill>
                   <a:srgbClr val="14191B"/>
                 </a:solidFill>
               </a:rPr>
               <a:t>The pipeline</a:t>
             </a:r>
-            <a:endParaRPr lang="en-US" sz="3000" dirty="0"/>
+            <a:endParaRPr lang="en-US" sz="3700" dirty="0"/>
           </a:p>
         </p:txBody>
       </p:sp>
@@ -10809,7 +10809,7 @@
               <a:buNone/>
             </a:pPr>
             <a:r>
-              <a:rPr lang="en-US" sz="1450" b="1" dirty="0">
+              <a:rPr lang="en-US" sz="1450" b="1" spc="-20" kern="0" dirty="0">
                 <a:solidFill>
                   <a:srgbClr val="14191B"/>
                 </a:solidFill>
@@ -10945,7 +10945,7 @@
               <a:buNone/>
             </a:pPr>
             <a:r>
-              <a:rPr lang="en-US" sz="1450" b="1" dirty="0">
+              <a:rPr lang="en-US" sz="1450" b="1" spc="-20" kern="0" dirty="0">
                 <a:solidFill>
                   <a:srgbClr val="14191B"/>
                 </a:solidFill>
@@ -11081,7 +11081,7 @@
               <a:buNone/>
             </a:pPr>
             <a:r>
-              <a:rPr lang="en-US" sz="1450" b="1" dirty="0">
+              <a:rPr lang="en-US" sz="1450" b="1" spc="-20" kern="0" dirty="0">
                 <a:solidFill>
                   <a:srgbClr val="14191B"/>
                 </a:solidFill>
@@ -11217,7 +11217,7 @@
               <a:buNone/>
             </a:pPr>
             <a:r>
-              <a:rPr lang="en-US" sz="1450" b="1" dirty="0">
+              <a:rPr lang="en-US" sz="1450" b="1" spc="-20" kern="0" dirty="0">
                 <a:solidFill>
                   <a:srgbClr val="14191B"/>
                 </a:solidFill>
@@ -11317,7 +11317,7 @@
               <a:buNone/>
             </a:pPr>
             <a:r>
-              <a:rPr lang="en-US" sz="1500" b="1" dirty="0">
+              <a:rPr lang="en-US" sz="1500" b="1" spc="-20" kern="0" dirty="0">
                 <a:solidFill>
                   <a:srgbClr val="14191B"/>
                 </a:solidFill>
@@ -11640,14 +11640,14 @@
               <a:buNone/>
             </a:pPr>
             <a:r>
-              <a:rPr lang="en-US" sz="3000" b="1" spc="-40" kern="0" dirty="0">
+              <a:rPr lang="en-US" sz="3700" b="1" spc="-90" kern="0" dirty="0">
                 <a:solidFill>
                   <a:srgbClr val="FFFFFF"/>
                 </a:solidFill>
               </a:rPr>
               <a:t>The gate</a:t>
             </a:r>
-            <a:endParaRPr lang="en-US" sz="3000" dirty="0"/>
+            <a:endParaRPr lang="en-US" sz="3700" dirty="0"/>
           </a:p>
         </p:txBody>
       </p:sp>
@@ -11699,19 +11699,19 @@
           <a:p>
             <a:pPr indent="0" marL="0">
               <a:lnSpc>
-                <a:spcPct val="105000"/>
+                <a:spcPct val="103000"/>
               </a:lnSpc>
               <a:buNone/>
             </a:pPr>
             <a:r>
-              <a:rPr lang="en-US" sz="2500" b="1" spc="-50" kern="0" dirty="0">
+              <a:rPr lang="en-US" sz="2800" b="1" spc="-90" kern="0" dirty="0">
                 <a:solidFill>
                   <a:srgbClr val="FFFFFF"/>
                 </a:solidFill>
               </a:rPr>
               <a:t>A scan that fails the build is only worth having if the fix is cheap.</a:t>
             </a:r>
-            <a:endParaRPr lang="en-US" sz="2500" dirty="0"/>
+            <a:endParaRPr lang="en-US" sz="2800" dirty="0"/>
           </a:p>
         </p:txBody>
       </p:sp>
@@ -12231,14 +12231,14 @@
               <a:buNone/>
             </a:pPr>
             <a:r>
-              <a:rPr lang="en-US" sz="3000" b="1" spc="-40" kern="0" dirty="0">
+              <a:rPr lang="en-US" sz="3700" b="1" spc="-90" kern="0" dirty="0">
                 <a:solidFill>
                   <a:srgbClr val="14191B"/>
                 </a:solidFill>
               </a:rPr>
               <a:t>Kubernetes and Helm</a:t>
             </a:r>
-            <a:endParaRPr lang="en-US" sz="3000" dirty="0"/>
+            <a:endParaRPr lang="en-US" sz="3700" dirty="0"/>
           </a:p>
         </p:txBody>
       </p:sp>
@@ -12925,19 +12925,19 @@
           <a:p>
             <a:pPr indent="0" marL="0">
               <a:lnSpc>
-                <a:spcPct val="105000"/>
+                <a:spcPct val="103000"/>
               </a:lnSpc>
               <a:buNone/>
             </a:pPr>
             <a:r>
-              <a:rPr lang="en-US" sz="1900" b="1" spc="-30" kern="0" dirty="0">
+              <a:rPr lang="en-US" sz="2200" b="1" spc="-60" kern="0" dirty="0">
                 <a:solidFill>
                   <a:srgbClr val="14191B"/>
                 </a:solidFill>
               </a:rPr>
               <a:t>Change the config and the Pods roll.</a:t>
             </a:r>
-            <a:endParaRPr lang="en-US" sz="1900" dirty="0"/>
+            <a:endParaRPr lang="en-US" sz="2200" dirty="0"/>
           </a:p>
         </p:txBody>
       </p:sp>
@@ -13200,7 +13200,7 @@
     </a:clrScheme>
     <a:fontScheme name="Issue Board Capstone">
       <a:majorFont>
-        <a:latin typeface="Arial"/>
+        <a:latin typeface="Libre Franklin"/>
         <a:ea typeface=""/>
         <a:cs typeface=""/>
         <a:font script="Jpan" typeface="游ゴシック Light"/>
@@ -13252,7 +13252,7 @@
         <a:font script="Tfng" typeface="Ebrima"/>
       </a:majorFont>
       <a:minorFont>
-        <a:latin typeface="Arial"/>
+        <a:latin typeface="Libre Franklin"/>
         <a:ea typeface=""/>
         <a:cs typeface=""/>
         <a:font script="Jpan" typeface="游ゴシック"/>
